--- a/Yazilim_Test_Muhendisligi_Kenan_YILMAZ.pptx
+++ b/Yazilim_Test_Muhendisligi_Kenan_YILMAZ.pptx
@@ -8084,7 +8084,7 @@
         </p:nvSpPr>
         <p:spPr>
           <a:xfrm>
-            <a:off x="457200" y="274320"/>
+            <a:off x="420624" y="553212"/>
             <a:ext cx="8229600" cy="594360"/>
           </a:xfrm>
           <a:prstGeom prst="rect">
@@ -8135,7 +8135,7 @@
         <p:spPr>
           <a:xfrm>
             <a:off x="365760" y="1005840"/>
-            <a:ext cx="8412480" cy="822960"/>
+            <a:ext cx="8412480" cy="504613"/>
           </a:xfrm>
           <a:prstGeom prst="rect">
             <a:avLst/>
@@ -8182,49 +8182,13 @@
       </p:sp>
       <p:sp>
         <p:nvSpPr>
-          <p:cNvPr id="6" name="Text 4"/>
-          <p:cNvSpPr/>
-          <p:nvPr/>
-        </p:nvSpPr>
-        <p:spPr>
-          <a:xfrm>
-            <a:off x="548640" y="1005840"/>
-            <a:ext cx="8046720" cy="822960"/>
-          </a:xfrm>
-          <a:prstGeom prst="rect">
-            <a:avLst/>
-          </a:prstGeom>
-          <a:noFill/>
-          <a:ln/>
-        </p:spPr>
-        <p:txBody>
-          <a:bodyPr wrap="square" lIns="0" tIns="0" rIns="0" bIns="0" rtlCol="0" anchor="ctr"/>
-          <a:lstStyle/>
-          <a:p>
-            <a:pPr marL="0" indent="0">
-              <a:buNone/>
-            </a:pPr>
-            <a:r>
-              <a:rPr lang="en-US" sz="1300" i="1" dirty="0">
-                <a:solidFill>
-                  <a:srgbClr val="7B61FF"/>
-                </a:solidFill>
-              </a:rPr>
-              <a:t>"Yapay zeka test mühendislerinin işini elinden almayacak; yapay zekayı kullanan mühendisler kullanmayanların yerini alacak."</a:t>
-            </a:r>
-            <a:endParaRPr lang="en-US" sz="1300" dirty="0"/>
-          </a:p>
-        </p:txBody>
-      </p:sp>
-      <p:sp>
-        <p:nvSpPr>
           <p:cNvPr id="7" name="Shape 5"/>
           <p:cNvSpPr/>
           <p:nvPr/>
         </p:nvSpPr>
         <p:spPr>
           <a:xfrm>
-            <a:off x="365760" y="2011680"/>
+            <a:off x="393192" y="1742948"/>
             <a:ext cx="4069080" cy="1325880"/>
           </a:xfrm>
           <a:prstGeom prst="rect">
@@ -8366,7 +8330,7 @@
         </p:nvSpPr>
         <p:spPr>
           <a:xfrm>
-            <a:off x="4709160" y="2011680"/>
+            <a:off x="4681728" y="1742948"/>
             <a:ext cx="4069080" cy="1325880"/>
           </a:xfrm>
           <a:prstGeom prst="rect">
@@ -8508,7 +8472,7 @@
         </p:nvSpPr>
         <p:spPr>
           <a:xfrm>
-            <a:off x="365760" y="3520440"/>
+            <a:off x="393192" y="3246120"/>
             <a:ext cx="4069080" cy="1325880"/>
           </a:xfrm>
           <a:prstGeom prst="rect">
@@ -8650,7 +8614,7 @@
         </p:nvSpPr>
         <p:spPr>
           <a:xfrm>
-            <a:off x="4709160" y="3520440"/>
+            <a:off x="4681728" y="3246120"/>
             <a:ext cx="4069080" cy="1325880"/>
           </a:xfrm>
           <a:prstGeom prst="rect">

--- a/Yazilim_Test_Muhendisligi_Kenan_YILMAZ.pptx
+++ b/Yazilim_Test_Muhendisligi_Kenan_YILMAZ.pptx
@@ -5,7 +5,7 @@
     <p:sldMasterId id="2147483648" r:id="rId1"/>
   </p:sldMasterIdLst>
   <p:notesMasterIdLst>
-    <p:notesMasterId r:id="rId12"/>
+    <p:notesMasterId r:id="rId10"/>
   </p:notesMasterIdLst>
   <p:sldIdLst>
     <p:sldId id="256" r:id="rId2"/>
@@ -15,9 +15,7 @@
     <p:sldId id="260" r:id="rId6"/>
     <p:sldId id="261" r:id="rId7"/>
     <p:sldId id="262" r:id="rId8"/>
-    <p:sldId id="263" r:id="rId9"/>
-    <p:sldId id="264" r:id="rId10"/>
-    <p:sldId id="265" r:id="rId11"/>
+    <p:sldId id="265" r:id="rId9"/>
   </p:sldIdLst>
   <p:sldSz cx="9144000" cy="5143500" type="screen16x9"/>
   <p:notesSz cx="5143500" cy="9144000"/>
@@ -330,90 +328,6 @@
 </p:notes>
 </file>
 
-<file path=ppt/notesSlides/notesSlide10.xml><?xml version="1.0" encoding="utf-8"?>
-<p:notes xmlns:a="http://schemas.openxmlformats.org/drawingml/2006/main" xmlns:r="http://schemas.openxmlformats.org/officeDocument/2006/relationships" xmlns:p="http://schemas.openxmlformats.org/presentationml/2006/main">
-  <p:cSld>
-    <p:spTree>
-      <p:nvGrpSpPr>
-        <p:cNvPr id="1" name=""/>
-        <p:cNvGrpSpPr/>
-        <p:nvPr/>
-      </p:nvGrpSpPr>
-      <p:grpSpPr>
-        <a:xfrm>
-          <a:off x="0" y="0"/>
-          <a:ext cx="0" cy="0"/>
-          <a:chOff x="0" y="0"/>
-          <a:chExt cx="0" cy="0"/>
-        </a:xfrm>
-      </p:grpSpPr>
-      <p:sp>
-        <p:nvSpPr>
-          <p:cNvPr id="2" name="Slide Image Placeholder 1"/>
-          <p:cNvSpPr>
-            <a:spLocks noGrp="1" noRot="1" noChangeAspect="1"/>
-          </p:cNvSpPr>
-          <p:nvPr>
-            <p:ph type="sldImg"/>
-          </p:nvPr>
-        </p:nvSpPr>
-        <p:spPr/>
-      </p:sp>
-      <p:sp>
-        <p:nvSpPr>
-          <p:cNvPr id="3" name="Notes Placeholder 2"/>
-          <p:cNvSpPr>
-            <a:spLocks noGrp="1"/>
-          </p:cNvSpPr>
-          <p:nvPr>
-            <p:ph type="body" idx="1"/>
-          </p:nvPr>
-        </p:nvSpPr>
-        <p:spPr/>
-        <p:txBody>
-          <a:bodyPr/>
-          <a:lstStyle/>
-          <a:p>
-            <a:endParaRPr lang="en-US" dirty="0"/>
-          </a:p>
-        </p:txBody>
-      </p:sp>
-      <p:sp>
-        <p:nvSpPr>
-          <p:cNvPr id="4" name="Slide Number Placeholder 3"/>
-          <p:cNvSpPr>
-            <a:spLocks noGrp="1"/>
-          </p:cNvSpPr>
-          <p:nvPr>
-            <p:ph type="sldNum" sz="quarter" idx="10"/>
-          </p:nvPr>
-        </p:nvSpPr>
-        <p:spPr/>
-        <p:txBody>
-          <a:bodyPr/>
-          <a:lstStyle/>
-          <a:p>
-            <a:fld id="{F7021451-1387-4CA6-816F-3879F97B5CBC}" type="slidenum">
-              <a:rPr lang="en-US"/>
-              <a:t>10</a:t>
-            </a:fld>
-            <a:endParaRPr lang="en-US"/>
-          </a:p>
-        </p:txBody>
-      </p:sp>
-    </p:spTree>
-    <p:extLst>
-      <p:ext uri="{BB962C8B-B14F-4D97-AF65-F5344CB8AC3E}">
-        <p14:creationId xmlns:p14="http://schemas.microsoft.com/office/powerpoint/2010/main" val="1024086991"/>
-      </p:ext>
-    </p:extLst>
-  </p:cSld>
-  <p:clrMapOvr>
-    <a:masterClrMapping/>
-  </p:clrMapOvr>
-</p:notes>
-</file>
-
 <file path=ppt/notesSlides/notesSlide2.xml><?xml version="1.0" encoding="utf-8"?>
 <p:notes xmlns:a="http://schemas.openxmlformats.org/drawingml/2006/main" xmlns:r="http://schemas.openxmlformats.org/officeDocument/2006/relationships" xmlns:p="http://schemas.openxmlformats.org/presentationml/2006/main">
   <p:cSld>
@@ -984,90 +898,6 @@
             <a:fld id="{F7021451-1387-4CA6-816F-3879F97B5CBC}" type="slidenum">
               <a:rPr lang="en-US"/>
               <a:t>8</a:t>
-            </a:fld>
-            <a:endParaRPr lang="en-US"/>
-          </a:p>
-        </p:txBody>
-      </p:sp>
-    </p:spTree>
-    <p:extLst>
-      <p:ext uri="{BB962C8B-B14F-4D97-AF65-F5344CB8AC3E}">
-        <p14:creationId xmlns:p14="http://schemas.microsoft.com/office/powerpoint/2010/main" val="1024086991"/>
-      </p:ext>
-    </p:extLst>
-  </p:cSld>
-  <p:clrMapOvr>
-    <a:masterClrMapping/>
-  </p:clrMapOvr>
-</p:notes>
-</file>
-
-<file path=ppt/notesSlides/notesSlide9.xml><?xml version="1.0" encoding="utf-8"?>
-<p:notes xmlns:a="http://schemas.openxmlformats.org/drawingml/2006/main" xmlns:r="http://schemas.openxmlformats.org/officeDocument/2006/relationships" xmlns:p="http://schemas.openxmlformats.org/presentationml/2006/main">
-  <p:cSld>
-    <p:spTree>
-      <p:nvGrpSpPr>
-        <p:cNvPr id="1" name=""/>
-        <p:cNvGrpSpPr/>
-        <p:nvPr/>
-      </p:nvGrpSpPr>
-      <p:grpSpPr>
-        <a:xfrm>
-          <a:off x="0" y="0"/>
-          <a:ext cx="0" cy="0"/>
-          <a:chOff x="0" y="0"/>
-          <a:chExt cx="0" cy="0"/>
-        </a:xfrm>
-      </p:grpSpPr>
-      <p:sp>
-        <p:nvSpPr>
-          <p:cNvPr id="2" name="Slide Image Placeholder 1"/>
-          <p:cNvSpPr>
-            <a:spLocks noGrp="1" noRot="1" noChangeAspect="1"/>
-          </p:cNvSpPr>
-          <p:nvPr>
-            <p:ph type="sldImg"/>
-          </p:nvPr>
-        </p:nvSpPr>
-        <p:spPr/>
-      </p:sp>
-      <p:sp>
-        <p:nvSpPr>
-          <p:cNvPr id="3" name="Notes Placeholder 2"/>
-          <p:cNvSpPr>
-            <a:spLocks noGrp="1"/>
-          </p:cNvSpPr>
-          <p:nvPr>
-            <p:ph type="body" idx="1"/>
-          </p:nvPr>
-        </p:nvSpPr>
-        <p:spPr/>
-        <p:txBody>
-          <a:bodyPr/>
-          <a:lstStyle/>
-          <a:p>
-            <a:endParaRPr lang="en-US" dirty="0"/>
-          </a:p>
-        </p:txBody>
-      </p:sp>
-      <p:sp>
-        <p:nvSpPr>
-          <p:cNvPr id="4" name="Slide Number Placeholder 3"/>
-          <p:cNvSpPr>
-            <a:spLocks noGrp="1"/>
-          </p:cNvSpPr>
-          <p:nvPr>
-            <p:ph type="sldNum" sz="quarter" idx="10"/>
-          </p:nvPr>
-        </p:nvSpPr>
-        <p:spPr/>
-        <p:txBody>
-          <a:bodyPr/>
-          <a:lstStyle/>
-          <a:p>
-            <a:fld id="{F7021451-1387-4CA6-816F-3879F97B5CBC}" type="slidenum">
-              <a:rPr lang="en-US"/>
-              <a:t>9</a:t>
             </a:fld>
             <a:endParaRPr lang="en-US"/>
           </a:p>
@@ -1742,235 +1572,6 @@
 </p:sld>
 </file>
 
-<file path=ppt/slides/slide10.xml><?xml version="1.0" encoding="utf-8"?>
-<p:sld xmlns:a="http://schemas.openxmlformats.org/drawingml/2006/main" xmlns:r="http://schemas.openxmlformats.org/officeDocument/2006/relationships" xmlns:p="http://schemas.openxmlformats.org/presentationml/2006/main">
-  <p:cSld name="Slide 10">
-    <p:bg>
-      <p:bgPr>
-        <a:solidFill>
-          <a:srgbClr val="0D1B2A"/>
-        </a:solidFill>
-        <a:effectLst/>
-      </p:bgPr>
-    </p:bg>
-    <p:spTree>
-      <p:nvGrpSpPr>
-        <p:cNvPr id="1" name=""/>
-        <p:cNvGrpSpPr/>
-        <p:nvPr/>
-      </p:nvGrpSpPr>
-      <p:grpSpPr>
-        <a:xfrm>
-          <a:off x="0" y="0"/>
-          <a:ext cx="0" cy="0"/>
-          <a:chOff x="0" y="0"/>
-          <a:chExt cx="0" cy="0"/>
-        </a:xfrm>
-      </p:grpSpPr>
-      <p:sp>
-        <p:nvSpPr>
-          <p:cNvPr id="2" name="Shape 0"/>
-          <p:cNvSpPr/>
-          <p:nvPr/>
-        </p:nvSpPr>
-        <p:spPr>
-          <a:xfrm>
-            <a:off x="6858000" y="-914400"/>
-            <a:ext cx="3657600" cy="3657600"/>
-          </a:xfrm>
-          <a:prstGeom prst="ellipse">
-            <a:avLst/>
-          </a:prstGeom>
-          <a:solidFill>
-            <a:srgbClr val="00C2FF">
-              <a:alpha val="8000"/>
-            </a:srgbClr>
-          </a:solidFill>
-          <a:ln w="12700">
-            <a:solidFill>
-              <a:srgbClr val="00C2FF">
-                <a:alpha val="15000"/>
-              </a:srgbClr>
-            </a:solidFill>
-            <a:prstDash val="solid"/>
-          </a:ln>
-        </p:spPr>
-      </p:sp>
-      <p:sp>
-        <p:nvSpPr>
-          <p:cNvPr id="3" name="Shape 1"/>
-          <p:cNvSpPr/>
-          <p:nvPr/>
-        </p:nvSpPr>
-        <p:spPr>
-          <a:xfrm>
-            <a:off x="-731520" y="2743200"/>
-            <a:ext cx="2743200" cy="2743200"/>
-          </a:xfrm>
-          <a:prstGeom prst="ellipse">
-            <a:avLst/>
-          </a:prstGeom>
-          <a:solidFill>
-            <a:srgbClr val="7B61FF">
-              <a:alpha val="8000"/>
-            </a:srgbClr>
-          </a:solidFill>
-          <a:ln w="12700">
-            <a:solidFill>
-              <a:srgbClr val="7B61FF">
-                <a:alpha val="15000"/>
-              </a:srgbClr>
-            </a:solidFill>
-            <a:prstDash val="solid"/>
-          </a:ln>
-        </p:spPr>
-      </p:sp>
-      <p:sp>
-        <p:nvSpPr>
-          <p:cNvPr id="4" name="Text 2"/>
-          <p:cNvSpPr/>
-          <p:nvPr/>
-        </p:nvSpPr>
-        <p:spPr>
-          <a:xfrm>
-            <a:off x="457200" y="1280160"/>
-            <a:ext cx="8229600" cy="1097280"/>
-          </a:xfrm>
-          <a:prstGeom prst="rect">
-            <a:avLst/>
-          </a:prstGeom>
-          <a:noFill/>
-          <a:ln/>
-        </p:spPr>
-        <p:txBody>
-          <a:bodyPr wrap="square" lIns="0" tIns="0" rIns="0" bIns="0" rtlCol="0" anchor="ctr"/>
-          <a:lstStyle/>
-          <a:p>
-            <a:pPr marL="0" indent="0" algn="ctr">
-              <a:buNone/>
-            </a:pPr>
-            <a:r>
-              <a:rPr lang="en-US" sz="6000" b="1" dirty="0">
-                <a:solidFill>
-                  <a:srgbClr val="FFFFFF"/>
-                </a:solidFill>
-                <a:latin typeface="Calibri" pitchFamily="34" charset="0"/>
-                <a:ea typeface="Calibri" pitchFamily="34" charset="-122"/>
-                <a:cs typeface="Calibri" pitchFamily="34" charset="-120"/>
-              </a:rPr>
-              <a:t>Sorularınız?</a:t>
-            </a:r>
-            <a:endParaRPr lang="en-US" sz="6000" dirty="0"/>
-          </a:p>
-        </p:txBody>
-      </p:sp>
-      <p:sp>
-        <p:nvSpPr>
-          <p:cNvPr id="5" name="Text 3"/>
-          <p:cNvSpPr/>
-          <p:nvPr/>
-        </p:nvSpPr>
-        <p:spPr>
-          <a:xfrm>
-            <a:off x="457200" y="2514600"/>
-            <a:ext cx="8229600" cy="548640"/>
-          </a:xfrm>
-          <a:prstGeom prst="rect">
-            <a:avLst/>
-          </a:prstGeom>
-          <a:noFill/>
-          <a:ln/>
-        </p:spPr>
-        <p:txBody>
-          <a:bodyPr wrap="square" lIns="0" tIns="0" rIns="0" bIns="0" rtlCol="0" anchor="ctr"/>
-          <a:lstStyle/>
-          <a:p>
-            <a:pPr marL="0" indent="0" algn="ctr">
-              <a:buNone/>
-            </a:pPr>
-            <a:r>
-              <a:rPr lang="en-US" sz="2200" b="1" dirty="0">
-                <a:solidFill>
-                  <a:srgbClr val="00C2FF"/>
-                </a:solidFill>
-              </a:rPr>
-              <a:t>Dinlediğiniz İçin Teşekkürler</a:t>
-            </a:r>
-            <a:endParaRPr lang="en-US" sz="2200" dirty="0"/>
-          </a:p>
-        </p:txBody>
-      </p:sp>
-      <p:sp>
-        <p:nvSpPr>
-          <p:cNvPr id="6" name="Shape 4"/>
-          <p:cNvSpPr/>
-          <p:nvPr/>
-        </p:nvSpPr>
-        <p:spPr>
-          <a:xfrm>
-            <a:off x="3200400" y="3200400"/>
-            <a:ext cx="2743200" cy="36576"/>
-          </a:xfrm>
-          <a:prstGeom prst="rect">
-            <a:avLst/>
-          </a:prstGeom>
-          <a:solidFill>
-            <a:srgbClr val="8BA8C8">
-              <a:alpha val="40000"/>
-            </a:srgbClr>
-          </a:solidFill>
-          <a:ln w="12700">
-            <a:solidFill>
-              <a:srgbClr val="0D1B2A"/>
-            </a:solidFill>
-            <a:prstDash val="solid"/>
-          </a:ln>
-        </p:spPr>
-      </p:sp>
-      <p:sp>
-        <p:nvSpPr>
-          <p:cNvPr id="7" name="Text 5"/>
-          <p:cNvSpPr/>
-          <p:nvPr/>
-        </p:nvSpPr>
-        <p:spPr>
-          <a:xfrm>
-            <a:off x="457200" y="3383280"/>
-            <a:ext cx="8229600" cy="365760"/>
-          </a:xfrm>
-          <a:prstGeom prst="rect">
-            <a:avLst/>
-          </a:prstGeom>
-          <a:noFill/>
-          <a:ln/>
-        </p:spPr>
-        <p:txBody>
-          <a:bodyPr wrap="square" lIns="0" tIns="0" rIns="0" bIns="0" rtlCol="0" anchor="ctr"/>
-          <a:lstStyle/>
-          <a:p>
-            <a:pPr marL="0" indent="0" algn="ctr">
-              <a:buNone/>
-            </a:pPr>
-            <a:r>
-              <a:rPr lang="en-US" sz="1200" dirty="0">
-                <a:solidFill>
-                  <a:srgbClr val="8BA8C8"/>
-                </a:solidFill>
-              </a:rPr>
-              <a:t>Kenan Yılmaz  ·  Yazılım Test Mühendisliği Sunumu</a:t>
-            </a:r>
-            <a:endParaRPr lang="en-US" sz="1200" dirty="0"/>
-          </a:p>
-        </p:txBody>
-      </p:sp>
-    </p:spTree>
-  </p:cSld>
-  <p:clrMapOvr>
-    <a:masterClrMapping/>
-  </p:clrMapOvr>
-</p:sld>
-</file>
-
 <file path=ppt/slides/slide2.xml><?xml version="1.0" encoding="utf-8"?>
 <p:sld xmlns:a="http://schemas.openxmlformats.org/drawingml/2006/main" xmlns:r="http://schemas.openxmlformats.org/officeDocument/2006/relationships" xmlns:p="http://schemas.openxmlformats.org/presentationml/2006/main">
   <p:cSld name="Slide 2">
@@ -4791,6 +4392,13 @@
             </a:outerShdw>
           </a:effectLst>
         </p:spPr>
+        <p:txBody>
+          <a:bodyPr/>
+          <a:lstStyle/>
+          <a:p>
+            <a:endParaRPr lang="tr-TR" dirty="0"/>
+          </a:p>
+        </p:txBody>
       </p:sp>
       <p:sp>
         <p:nvSpPr>
@@ -6034,6 +5642,13 @@
             </a:outerShdw>
           </a:effectLst>
         </p:spPr>
+        <p:txBody>
+          <a:bodyPr/>
+          <a:lstStyle/>
+          <a:p>
+            <a:endParaRPr lang="tr-TR" dirty="0"/>
+          </a:p>
+        </p:txBody>
       </p:sp>
       <p:sp>
         <p:nvSpPr>
@@ -7175,7 +6790,7 @@
 
 <file path=ppt/slides/slide8.xml><?xml version="1.0" encoding="utf-8"?>
 <p:sld xmlns:a="http://schemas.openxmlformats.org/drawingml/2006/main" xmlns:r="http://schemas.openxmlformats.org/officeDocument/2006/relationships" xmlns:p="http://schemas.openxmlformats.org/presentationml/2006/main">
-  <p:cSld name="Slide 8">
+  <p:cSld name="Slide 10">
     <p:bg>
       <p:bgPr>
         <a:solidFill>
@@ -7200,154 +6815,154 @@
       </p:grpSpPr>
       <p:sp>
         <p:nvSpPr>
-          <p:cNvPr id="2" name="Text 0"/>
-          <p:cNvSpPr/>
-          <p:nvPr/>
-        </p:nvSpPr>
-        <p:spPr>
-          <a:xfrm>
-            <a:off x="8503920" y="137160"/>
-            <a:ext cx="548640" cy="320040"/>
-          </a:xfrm>
-          <a:prstGeom prst="rect">
-            <a:avLst/>
-          </a:prstGeom>
-          <a:noFill/>
-          <a:ln/>
-        </p:spPr>
-        <p:txBody>
-          <a:bodyPr wrap="square" lIns="0" tIns="0" rIns="0" bIns="0" rtlCol="0" anchor="ctr"/>
-          <a:lstStyle/>
-          <a:p>
-            <a:pPr marL="0" indent="0">
-              <a:buNone/>
-            </a:pPr>
-            <a:r>
-              <a:rPr lang="en-US" sz="1000" b="1" dirty="0">
-                <a:solidFill>
-                  <a:srgbClr val="00C2FF">
-                    <a:alpha val="60000"/>
-                  </a:srgbClr>
-                </a:solidFill>
-              </a:rPr>
-              <a:t>08</a:t>
-            </a:r>
-            <a:endParaRPr lang="en-US" sz="1000" dirty="0"/>
-          </a:p>
-        </p:txBody>
-      </p:sp>
-      <p:sp>
-        <p:nvSpPr>
-          <p:cNvPr id="3" name="Text 1"/>
-          <p:cNvSpPr/>
-          <p:nvPr/>
-        </p:nvSpPr>
-        <p:spPr>
-          <a:xfrm>
-            <a:off x="457200" y="274320"/>
-            <a:ext cx="8229600" cy="594360"/>
-          </a:xfrm>
-          <a:prstGeom prst="rect">
-            <a:avLst/>
-          </a:prstGeom>
-          <a:noFill/>
-          <a:ln/>
-        </p:spPr>
-        <p:txBody>
-          <a:bodyPr wrap="square" lIns="0" tIns="0" rIns="0" bIns="0" rtlCol="0" anchor="ctr"/>
-          <a:lstStyle/>
-          <a:p>
-            <a:pPr marL="0" indent="0">
-              <a:buNone/>
-            </a:pPr>
-            <a:r>
-              <a:rPr lang="en-US" sz="2800" b="1" dirty="0">
-                <a:solidFill>
-                  <a:srgbClr val="FFFFFF"/>
-                </a:solidFill>
-                <a:latin typeface="Calibri" pitchFamily="34" charset="0"/>
-                <a:ea typeface="Calibri" pitchFamily="34" charset="-122"/>
-                <a:cs typeface="Calibri" pitchFamily="34" charset="-120"/>
-              </a:rPr>
-              <a:t>Gelişmiş </a:t>
-            </a:r>
-            <a:r>
-              <a:rPr lang="en-US" sz="2800" b="1" dirty="0">
-                <a:solidFill>
-                  <a:srgbClr val="00C2FF"/>
-                </a:solidFill>
-                <a:latin typeface="Calibri" pitchFamily="34" charset="0"/>
-                <a:ea typeface="Calibri" pitchFamily="34" charset="-122"/>
-                <a:cs typeface="Calibri" pitchFamily="34" charset="-120"/>
-              </a:rPr>
-              <a:t>AI Test </a:t>
-            </a:r>
-            <a:r>
-              <a:rPr lang="en-US" sz="2800" b="1" dirty="0">
-                <a:solidFill>
-                  <a:srgbClr val="FFFFFF"/>
-                </a:solidFill>
-                <a:latin typeface="Calibri" pitchFamily="34" charset="0"/>
-                <a:ea typeface="Calibri" pitchFamily="34" charset="-122"/>
-                <a:cs typeface="Calibri" pitchFamily="34" charset="-120"/>
-              </a:rPr>
-              <a:t>Senaryoları</a:t>
-            </a:r>
-            <a:endParaRPr lang="en-US" sz="2800" dirty="0"/>
-          </a:p>
-        </p:txBody>
-      </p:sp>
-      <p:sp>
-        <p:nvSpPr>
-          <p:cNvPr id="4" name="Shape 2"/>
-          <p:cNvSpPr/>
-          <p:nvPr/>
-        </p:nvSpPr>
-        <p:spPr>
-          <a:xfrm>
-            <a:off x="365760" y="1005840"/>
-            <a:ext cx="2651760" cy="3749040"/>
-          </a:xfrm>
-          <a:prstGeom prst="rect">
-            <a:avLst/>
-          </a:prstGeom>
-          <a:solidFill>
-            <a:srgbClr val="162840"/>
+          <p:cNvPr id="2" name="Shape 0"/>
+          <p:cNvSpPr/>
+          <p:nvPr/>
+        </p:nvSpPr>
+        <p:spPr>
+          <a:xfrm>
+            <a:off x="6858000" y="-914400"/>
+            <a:ext cx="3657600" cy="3657600"/>
+          </a:xfrm>
+          <a:prstGeom prst="ellipse">
+            <a:avLst/>
+          </a:prstGeom>
+          <a:solidFill>
+            <a:srgbClr val="00C2FF">
+              <a:alpha val="8000"/>
+            </a:srgbClr>
           </a:solidFill>
           <a:ln w="12700">
             <a:solidFill>
               <a:srgbClr val="00C2FF">
-                <a:alpha val="40000"/>
+                <a:alpha val="15000"/>
               </a:srgbClr>
             </a:solidFill>
             <a:prstDash val="solid"/>
           </a:ln>
-          <a:effectLst>
-            <a:outerShdw blurRad="127000" dist="38100" dir="8100000" algn="bl" rotWithShape="0">
-              <a:srgbClr val="000000">
-                <a:alpha val="25000"/>
+        </p:spPr>
+      </p:sp>
+      <p:sp>
+        <p:nvSpPr>
+          <p:cNvPr id="3" name="Shape 1"/>
+          <p:cNvSpPr/>
+          <p:nvPr/>
+        </p:nvSpPr>
+        <p:spPr>
+          <a:xfrm>
+            <a:off x="-731520" y="2743200"/>
+            <a:ext cx="2743200" cy="2743200"/>
+          </a:xfrm>
+          <a:prstGeom prst="ellipse">
+            <a:avLst/>
+          </a:prstGeom>
+          <a:solidFill>
+            <a:srgbClr val="7B61FF">
+              <a:alpha val="8000"/>
+            </a:srgbClr>
+          </a:solidFill>
+          <a:ln w="12700">
+            <a:solidFill>
+              <a:srgbClr val="7B61FF">
+                <a:alpha val="15000"/>
               </a:srgbClr>
-            </a:outerShdw>
-          </a:effectLst>
-        </p:spPr>
-      </p:sp>
-      <p:sp>
-        <p:nvSpPr>
-          <p:cNvPr id="5" name="Shape 3"/>
-          <p:cNvSpPr/>
-          <p:nvPr/>
-        </p:nvSpPr>
-        <p:spPr>
-          <a:xfrm>
-            <a:off x="365760" y="1005840"/>
-            <a:ext cx="2651760" cy="1188720"/>
-          </a:xfrm>
-          <a:prstGeom prst="rect">
-            <a:avLst/>
-          </a:prstGeom>
-          <a:solidFill>
-            <a:srgbClr val="00C2FF">
-              <a:alpha val="16000"/>
+            </a:solidFill>
+            <a:prstDash val="solid"/>
+          </a:ln>
+        </p:spPr>
+      </p:sp>
+      <p:sp>
+        <p:nvSpPr>
+          <p:cNvPr id="4" name="Text 2"/>
+          <p:cNvSpPr/>
+          <p:nvPr/>
+        </p:nvSpPr>
+        <p:spPr>
+          <a:xfrm>
+            <a:off x="457200" y="1280160"/>
+            <a:ext cx="8229600" cy="1097280"/>
+          </a:xfrm>
+          <a:prstGeom prst="rect">
+            <a:avLst/>
+          </a:prstGeom>
+          <a:noFill/>
+          <a:ln/>
+        </p:spPr>
+        <p:txBody>
+          <a:bodyPr wrap="square" lIns="0" tIns="0" rIns="0" bIns="0" rtlCol="0" anchor="ctr"/>
+          <a:lstStyle/>
+          <a:p>
+            <a:pPr marL="0" indent="0" algn="ctr">
+              <a:buNone/>
+            </a:pPr>
+            <a:r>
+              <a:rPr lang="en-US" sz="6000" b="1" dirty="0">
+                <a:solidFill>
+                  <a:srgbClr val="FFFFFF"/>
+                </a:solidFill>
+                <a:latin typeface="Calibri" pitchFamily="34" charset="0"/>
+                <a:ea typeface="Calibri" pitchFamily="34" charset="-122"/>
+                <a:cs typeface="Calibri" pitchFamily="34" charset="-120"/>
+              </a:rPr>
+              <a:t>Sorularınız?</a:t>
+            </a:r>
+            <a:endParaRPr lang="en-US" sz="6000" dirty="0"/>
+          </a:p>
+        </p:txBody>
+      </p:sp>
+      <p:sp>
+        <p:nvSpPr>
+          <p:cNvPr id="5" name="Text 3"/>
+          <p:cNvSpPr/>
+          <p:nvPr/>
+        </p:nvSpPr>
+        <p:spPr>
+          <a:xfrm>
+            <a:off x="457200" y="2514600"/>
+            <a:ext cx="8229600" cy="548640"/>
+          </a:xfrm>
+          <a:prstGeom prst="rect">
+            <a:avLst/>
+          </a:prstGeom>
+          <a:noFill/>
+          <a:ln/>
+        </p:spPr>
+        <p:txBody>
+          <a:bodyPr wrap="square" lIns="0" tIns="0" rIns="0" bIns="0" rtlCol="0" anchor="ctr"/>
+          <a:lstStyle/>
+          <a:p>
+            <a:pPr marL="0" indent="0" algn="ctr">
+              <a:buNone/>
+            </a:pPr>
+            <a:r>
+              <a:rPr lang="en-US" sz="2200" b="1" dirty="0">
+                <a:solidFill>
+                  <a:srgbClr val="00C2FF"/>
+                </a:solidFill>
+              </a:rPr>
+              <a:t>Dinlediğiniz İçin Teşekkürler</a:t>
+            </a:r>
+            <a:endParaRPr lang="en-US" sz="2200" dirty="0"/>
+          </a:p>
+        </p:txBody>
+      </p:sp>
+      <p:sp>
+        <p:nvSpPr>
+          <p:cNvPr id="6" name="Shape 4"/>
+          <p:cNvSpPr/>
+          <p:nvPr/>
+        </p:nvSpPr>
+        <p:spPr>
+          <a:xfrm>
+            <a:off x="3200400" y="3200400"/>
+            <a:ext cx="2743200" cy="36576"/>
+          </a:xfrm>
+          <a:prstGeom prst="rect">
+            <a:avLst/>
+          </a:prstGeom>
+          <a:solidFill>
+            <a:srgbClr val="8BA8C8">
+              <a:alpha val="40000"/>
             </a:srgbClr>
           </a:solidFill>
           <a:ln w="12700">
@@ -7360,41 +6975,14 @@
       </p:sp>
       <p:sp>
         <p:nvSpPr>
-          <p:cNvPr id="6" name="Shape 4"/>
-          <p:cNvSpPr/>
-          <p:nvPr/>
-        </p:nvSpPr>
-        <p:spPr>
-          <a:xfrm>
-            <a:off x="1371600" y="1115568"/>
-            <a:ext cx="640080" cy="640080"/>
-          </a:xfrm>
-          <a:prstGeom prst="ellipse">
-            <a:avLst/>
-          </a:prstGeom>
-          <a:solidFill>
-            <a:srgbClr val="00C2FF">
-              <a:alpha val="40000"/>
-            </a:srgbClr>
-          </a:solidFill>
-          <a:ln w="12700">
-            <a:solidFill>
-              <a:srgbClr val="00C2FF"/>
-            </a:solidFill>
-            <a:prstDash val="solid"/>
-          </a:ln>
-        </p:spPr>
-      </p:sp>
-      <p:sp>
-        <p:nvSpPr>
           <p:cNvPr id="7" name="Text 5"/>
           <p:cNvSpPr/>
           <p:nvPr/>
         </p:nvSpPr>
         <p:spPr>
           <a:xfrm>
-            <a:off x="1371600" y="1115568"/>
-            <a:ext cx="640080" cy="640080"/>
+            <a:off x="457200" y="3383280"/>
+            <a:ext cx="8229600" cy="365760"/>
           </a:xfrm>
           <a:prstGeom prst="rect">
             <a:avLst/>
@@ -7410,1341 +6998,14 @@
               <a:buNone/>
             </a:pPr>
             <a:r>
-              <a:rPr lang="en-US" sz="2000" dirty="0">
-                <a:solidFill>
-                  <a:srgbClr val="000000"/>
-                </a:solidFill>
-              </a:rPr>
-              <a:t>👁</a:t>
-            </a:r>
-            <a:endParaRPr lang="en-US" sz="2000" dirty="0"/>
-          </a:p>
-        </p:txBody>
-      </p:sp>
-      <p:sp>
-        <p:nvSpPr>
-          <p:cNvPr id="8" name="Text 6"/>
-          <p:cNvSpPr/>
-          <p:nvPr/>
-        </p:nvSpPr>
-        <p:spPr>
-          <a:xfrm>
-            <a:off x="457200" y="1828800"/>
-            <a:ext cx="2468880" cy="411480"/>
-          </a:xfrm>
-          <a:prstGeom prst="rect">
-            <a:avLst/>
-          </a:prstGeom>
-          <a:noFill/>
-          <a:ln/>
-        </p:spPr>
-        <p:txBody>
-          <a:bodyPr wrap="square" lIns="0" tIns="0" rIns="0" bIns="0" rtlCol="0" anchor="ctr"/>
-          <a:lstStyle/>
-          <a:p>
-            <a:pPr marL="0" indent="0" algn="ctr">
-              <a:buNone/>
-            </a:pPr>
-            <a:r>
-              <a:rPr lang="en-US" sz="1300" b="1" dirty="0">
-                <a:solidFill>
-                  <a:srgbClr val="00C2FF"/>
-                </a:solidFill>
-              </a:rPr>
-              <a:t>Görsel Test (CV)</a:t>
-            </a:r>
-            <a:endParaRPr lang="en-US" sz="1300" dirty="0"/>
-          </a:p>
-        </p:txBody>
-      </p:sp>
-      <p:sp>
-        <p:nvSpPr>
-          <p:cNvPr id="9" name="Text 7"/>
-          <p:cNvSpPr/>
-          <p:nvPr/>
-        </p:nvSpPr>
-        <p:spPr>
-          <a:xfrm>
-            <a:off x="548640" y="2331720"/>
-            <a:ext cx="2331720" cy="2194560"/>
-          </a:xfrm>
-          <a:prstGeom prst="rect">
-            <a:avLst/>
-          </a:prstGeom>
-          <a:noFill/>
-          <a:ln/>
-        </p:spPr>
-        <p:txBody>
-          <a:bodyPr wrap="square" lIns="0" tIns="0" rIns="0" bIns="0" rtlCol="0" anchor="t"/>
-          <a:lstStyle/>
-          <a:p>
-            <a:pPr marL="342900" indent="-342900">
-              <a:spcAft>
-                <a:spcPts val="800"/>
-              </a:spcAft>
-              <a:buSzPct val="100000"/>
-              <a:buChar char="•"/>
-            </a:pPr>
-            <a:r>
-              <a:rPr lang="en-US" sz="1100" dirty="0">
-                <a:solidFill>
-                  <a:srgbClr val="D0E8FF"/>
-                </a:solidFill>
-              </a:rPr>
-              <a:t>Görüntü işleme modelleri (Computer Vision)</a:t>
-            </a:r>
-            <a:endParaRPr lang="en-US" sz="1100" dirty="0"/>
-          </a:p>
-          <a:p>
-            <a:pPr marL="342900" indent="-342900">
-              <a:spcAft>
-                <a:spcPts val="800"/>
-              </a:spcAft>
-              <a:buSzPct val="100000"/>
-              <a:buChar char="•"/>
-            </a:pPr>
-            <a:r>
-              <a:rPr lang="en-US" sz="1100" dirty="0">
-                <a:solidFill>
-                  <a:srgbClr val="D0E8FF"/>
-                </a:solidFill>
-              </a:rPr>
-              <a:t>UI'ı insan gözü gibi tarayıp piksel kaymalarını tespit eder</a:t>
-            </a:r>
-            <a:endParaRPr lang="en-US" sz="1100" dirty="0"/>
-          </a:p>
-          <a:p>
-            <a:pPr marL="342900" indent="-342900">
-              <a:spcAft>
-                <a:spcPts val="800"/>
-              </a:spcAft>
-              <a:buSzPct val="100000"/>
-              <a:buChar char="•"/>
-            </a:pPr>
-            <a:r>
-              <a:rPr lang="en-US" sz="1100" dirty="0">
-                <a:solidFill>
-                  <a:srgbClr val="D0E8FF"/>
-                </a:solidFill>
-              </a:rPr>
-              <a:t>Renk hatalarını ve arayüz bozulmalarını koda bakmadan bulur</a:t>
-            </a:r>
-            <a:endParaRPr lang="en-US" sz="1100" dirty="0"/>
-          </a:p>
-        </p:txBody>
-      </p:sp>
-      <p:sp>
-        <p:nvSpPr>
-          <p:cNvPr id="10" name="Shape 8"/>
-          <p:cNvSpPr/>
-          <p:nvPr/>
-        </p:nvSpPr>
-        <p:spPr>
-          <a:xfrm>
-            <a:off x="3200400" y="1005840"/>
-            <a:ext cx="2651760" cy="3749040"/>
-          </a:xfrm>
-          <a:prstGeom prst="rect">
-            <a:avLst/>
-          </a:prstGeom>
-          <a:solidFill>
-            <a:srgbClr val="162840"/>
-          </a:solidFill>
-          <a:ln w="12700">
-            <a:solidFill>
-              <a:srgbClr val="7B61FF">
-                <a:alpha val="40000"/>
-              </a:srgbClr>
-            </a:solidFill>
-            <a:prstDash val="solid"/>
-          </a:ln>
-          <a:effectLst>
-            <a:outerShdw blurRad="127000" dist="38100" dir="8100000" algn="bl" rotWithShape="0">
-              <a:srgbClr val="000000">
-                <a:alpha val="25000"/>
-              </a:srgbClr>
-            </a:outerShdw>
-          </a:effectLst>
-        </p:spPr>
-      </p:sp>
-      <p:sp>
-        <p:nvSpPr>
-          <p:cNvPr id="11" name="Shape 9"/>
-          <p:cNvSpPr/>
-          <p:nvPr/>
-        </p:nvSpPr>
-        <p:spPr>
-          <a:xfrm>
-            <a:off x="3200400" y="1005840"/>
-            <a:ext cx="2651760" cy="1188720"/>
-          </a:xfrm>
-          <a:prstGeom prst="rect">
-            <a:avLst/>
-          </a:prstGeom>
-          <a:solidFill>
-            <a:srgbClr val="7B61FF">
-              <a:alpha val="16000"/>
-            </a:srgbClr>
-          </a:solidFill>
-          <a:ln w="12700">
-            <a:solidFill>
-              <a:srgbClr val="0D1B2A"/>
-            </a:solidFill>
-            <a:prstDash val="solid"/>
-          </a:ln>
-        </p:spPr>
-      </p:sp>
-      <p:sp>
-        <p:nvSpPr>
-          <p:cNvPr id="12" name="Shape 10"/>
-          <p:cNvSpPr/>
-          <p:nvPr/>
-        </p:nvSpPr>
-        <p:spPr>
-          <a:xfrm>
-            <a:off x="4206240" y="1115568"/>
-            <a:ext cx="640080" cy="640080"/>
-          </a:xfrm>
-          <a:prstGeom prst="ellipse">
-            <a:avLst/>
-          </a:prstGeom>
-          <a:solidFill>
-            <a:srgbClr val="7B61FF">
-              <a:alpha val="40000"/>
-            </a:srgbClr>
-          </a:solidFill>
-          <a:ln w="12700">
-            <a:solidFill>
-              <a:srgbClr val="7B61FF"/>
-            </a:solidFill>
-            <a:prstDash val="solid"/>
-          </a:ln>
-        </p:spPr>
-      </p:sp>
-      <p:sp>
-        <p:nvSpPr>
-          <p:cNvPr id="13" name="Text 11"/>
-          <p:cNvSpPr/>
-          <p:nvPr/>
-        </p:nvSpPr>
-        <p:spPr>
-          <a:xfrm>
-            <a:off x="4206240" y="1115568"/>
-            <a:ext cx="640080" cy="640080"/>
-          </a:xfrm>
-          <a:prstGeom prst="rect">
-            <a:avLst/>
-          </a:prstGeom>
-          <a:noFill/>
-          <a:ln/>
-        </p:spPr>
-        <p:txBody>
-          <a:bodyPr wrap="square" lIns="0" tIns="0" rIns="0" bIns="0" rtlCol="0" anchor="ctr"/>
-          <a:lstStyle/>
-          <a:p>
-            <a:pPr marL="0" indent="0" algn="ctr">
-              <a:buNone/>
-            </a:pPr>
-            <a:r>
-              <a:rPr lang="en-US" sz="2000" dirty="0">
-                <a:solidFill>
-                  <a:srgbClr val="000000"/>
-                </a:solidFill>
-              </a:rPr>
-              <a:t>💬</a:t>
-            </a:r>
-            <a:endParaRPr lang="en-US" sz="2000" dirty="0"/>
-          </a:p>
-        </p:txBody>
-      </p:sp>
-      <p:sp>
-        <p:nvSpPr>
-          <p:cNvPr id="14" name="Text 12"/>
-          <p:cNvSpPr/>
-          <p:nvPr/>
-        </p:nvSpPr>
-        <p:spPr>
-          <a:xfrm>
-            <a:off x="3291840" y="1828800"/>
-            <a:ext cx="2468880" cy="411480"/>
-          </a:xfrm>
-          <a:prstGeom prst="rect">
-            <a:avLst/>
-          </a:prstGeom>
-          <a:noFill/>
-          <a:ln/>
-        </p:spPr>
-        <p:txBody>
-          <a:bodyPr wrap="square" lIns="0" tIns="0" rIns="0" bIns="0" rtlCol="0" anchor="ctr"/>
-          <a:lstStyle/>
-          <a:p>
-            <a:pPr marL="0" indent="0" algn="ctr">
-              <a:buNone/>
-            </a:pPr>
-            <a:r>
-              <a:rPr lang="en-US" sz="1300" b="1" dirty="0">
-                <a:solidFill>
-                  <a:srgbClr val="7B61FF"/>
-                </a:solidFill>
-              </a:rPr>
-              <a:t>Doğal Dil İşleme</a:t>
-            </a:r>
-            <a:endParaRPr lang="en-US" sz="1300" dirty="0"/>
-          </a:p>
-        </p:txBody>
-      </p:sp>
-      <p:sp>
-        <p:nvSpPr>
-          <p:cNvPr id="15" name="Text 13"/>
-          <p:cNvSpPr/>
-          <p:nvPr/>
-        </p:nvSpPr>
-        <p:spPr>
-          <a:xfrm>
-            <a:off x="3383280" y="2331720"/>
-            <a:ext cx="2331720" cy="2194560"/>
-          </a:xfrm>
-          <a:prstGeom prst="rect">
-            <a:avLst/>
-          </a:prstGeom>
-          <a:noFill/>
-          <a:ln/>
-        </p:spPr>
-        <p:txBody>
-          <a:bodyPr wrap="square" lIns="0" tIns="0" rIns="0" bIns="0" rtlCol="0" anchor="t"/>
-          <a:lstStyle/>
-          <a:p>
-            <a:pPr marL="342900" indent="-342900">
-              <a:spcAft>
-                <a:spcPts val="800"/>
-              </a:spcAft>
-              <a:buSzPct val="100000"/>
-              <a:buChar char="•"/>
-            </a:pPr>
-            <a:r>
-              <a:rPr lang="en-US" sz="1100" dirty="0">
-                <a:solidFill>
-                  <a:srgbClr val="D0E8FF"/>
-                </a:solidFill>
-              </a:rPr>
-              <a:t>NLP teknolojisi kullanılır</a:t>
-            </a:r>
-            <a:endParaRPr lang="en-US" sz="1100" dirty="0"/>
-          </a:p>
-          <a:p>
-            <a:pPr marL="342900" indent="-342900">
-              <a:spcAft>
-                <a:spcPts val="800"/>
-              </a:spcAft>
-              <a:buSzPct val="100000"/>
-              <a:buChar char="•"/>
-            </a:pPr>
-            <a:r>
-              <a:rPr lang="en-US" sz="1100" dirty="0">
-                <a:solidFill>
-                  <a:srgbClr val="D0E8FF"/>
-                </a:solidFill>
-              </a:rPr>
-              <a:t>Müşteri geri bildirimlerini ve destek biletlerini analiz eder</a:t>
-            </a:r>
-            <a:endParaRPr lang="en-US" sz="1100" dirty="0"/>
-          </a:p>
-          <a:p>
-            <a:pPr marL="342900" indent="-342900">
-              <a:spcAft>
-                <a:spcPts val="800"/>
-              </a:spcAft>
-              <a:buSzPct val="100000"/>
-              <a:buChar char="•"/>
-            </a:pPr>
-            <a:r>
-              <a:rPr lang="en-US" sz="1100" dirty="0">
-                <a:solidFill>
-                  <a:srgbClr val="D0E8FF"/>
-                </a:solidFill>
-              </a:rPr>
-              <a:t>Yazılım hatalarının otomatik loglanması ve sınıflandırılması sağlanır</a:t>
-            </a:r>
-            <a:endParaRPr lang="en-US" sz="1100" dirty="0"/>
-          </a:p>
-        </p:txBody>
-      </p:sp>
-      <p:sp>
-        <p:nvSpPr>
-          <p:cNvPr id="16" name="Shape 14"/>
-          <p:cNvSpPr/>
-          <p:nvPr/>
-        </p:nvSpPr>
-        <p:spPr>
-          <a:xfrm>
-            <a:off x="6035040" y="1005840"/>
-            <a:ext cx="2651760" cy="3749040"/>
-          </a:xfrm>
-          <a:prstGeom prst="rect">
-            <a:avLst/>
-          </a:prstGeom>
-          <a:solidFill>
-            <a:srgbClr val="162840"/>
-          </a:solidFill>
-          <a:ln w="12700">
-            <a:solidFill>
-              <a:srgbClr val="00E5A0">
-                <a:alpha val="40000"/>
-              </a:srgbClr>
-            </a:solidFill>
-            <a:prstDash val="solid"/>
-          </a:ln>
-          <a:effectLst>
-            <a:outerShdw blurRad="127000" dist="38100" dir="8100000" algn="bl" rotWithShape="0">
-              <a:srgbClr val="000000">
-                <a:alpha val="25000"/>
-              </a:srgbClr>
-            </a:outerShdw>
-          </a:effectLst>
-        </p:spPr>
-      </p:sp>
-      <p:sp>
-        <p:nvSpPr>
-          <p:cNvPr id="17" name="Shape 15"/>
-          <p:cNvSpPr/>
-          <p:nvPr/>
-        </p:nvSpPr>
-        <p:spPr>
-          <a:xfrm>
-            <a:off x="6035040" y="1005840"/>
-            <a:ext cx="2651760" cy="1188720"/>
-          </a:xfrm>
-          <a:prstGeom prst="rect">
-            <a:avLst/>
-          </a:prstGeom>
-          <a:solidFill>
-            <a:srgbClr val="00E5A0">
-              <a:alpha val="16000"/>
-            </a:srgbClr>
-          </a:solidFill>
-          <a:ln w="12700">
-            <a:solidFill>
-              <a:srgbClr val="0D1B2A"/>
-            </a:solidFill>
-            <a:prstDash val="solid"/>
-          </a:ln>
-        </p:spPr>
-      </p:sp>
-      <p:sp>
-        <p:nvSpPr>
-          <p:cNvPr id="18" name="Shape 16"/>
-          <p:cNvSpPr/>
-          <p:nvPr/>
-        </p:nvSpPr>
-        <p:spPr>
-          <a:xfrm>
-            <a:off x="7040880" y="1115568"/>
-            <a:ext cx="640080" cy="640080"/>
-          </a:xfrm>
-          <a:prstGeom prst="ellipse">
-            <a:avLst/>
-          </a:prstGeom>
-          <a:solidFill>
-            <a:srgbClr val="00E5A0">
-              <a:alpha val="40000"/>
-            </a:srgbClr>
-          </a:solidFill>
-          <a:ln w="12700">
-            <a:solidFill>
-              <a:srgbClr val="00E5A0"/>
-            </a:solidFill>
-            <a:prstDash val="solid"/>
-          </a:ln>
-        </p:spPr>
-      </p:sp>
-      <p:sp>
-        <p:nvSpPr>
-          <p:cNvPr id="19" name="Text 17"/>
-          <p:cNvSpPr/>
-          <p:nvPr/>
-        </p:nvSpPr>
-        <p:spPr>
-          <a:xfrm>
-            <a:off x="7040880" y="1115568"/>
-            <a:ext cx="640080" cy="640080"/>
-          </a:xfrm>
-          <a:prstGeom prst="rect">
-            <a:avLst/>
-          </a:prstGeom>
-          <a:noFill/>
-          <a:ln/>
-        </p:spPr>
-        <p:txBody>
-          <a:bodyPr wrap="square" lIns="0" tIns="0" rIns="0" bIns="0" rtlCol="0" anchor="ctr"/>
-          <a:lstStyle/>
-          <a:p>
-            <a:pPr marL="0" indent="0" algn="ctr">
-              <a:buNone/>
-            </a:pPr>
-            <a:r>
-              <a:rPr lang="en-US" sz="2000" dirty="0">
-                <a:solidFill>
-                  <a:srgbClr val="000000"/>
-                </a:solidFill>
-              </a:rPr>
-              <a:t>✨</a:t>
-            </a:r>
-            <a:endParaRPr lang="en-US" sz="2000" dirty="0"/>
-          </a:p>
-        </p:txBody>
-      </p:sp>
-      <p:sp>
-        <p:nvSpPr>
-          <p:cNvPr id="20" name="Text 18"/>
-          <p:cNvSpPr/>
-          <p:nvPr/>
-        </p:nvSpPr>
-        <p:spPr>
-          <a:xfrm>
-            <a:off x="6126480" y="1828800"/>
-            <a:ext cx="2468880" cy="411480"/>
-          </a:xfrm>
-          <a:prstGeom prst="rect">
-            <a:avLst/>
-          </a:prstGeom>
-          <a:noFill/>
-          <a:ln/>
-        </p:spPr>
-        <p:txBody>
-          <a:bodyPr wrap="square" lIns="0" tIns="0" rIns="0" bIns="0" rtlCol="0" anchor="ctr"/>
-          <a:lstStyle/>
-          <a:p>
-            <a:pPr marL="0" indent="0" algn="ctr">
-              <a:buNone/>
-            </a:pPr>
-            <a:r>
-              <a:rPr lang="en-US" sz="1300" b="1" dirty="0">
-                <a:solidFill>
-                  <a:srgbClr val="00E5A0"/>
-                </a:solidFill>
-              </a:rPr>
-              <a:t>Self-Healing</a:t>
-            </a:r>
-            <a:endParaRPr lang="en-US" sz="1300" dirty="0"/>
-          </a:p>
-        </p:txBody>
-      </p:sp>
-      <p:sp>
-        <p:nvSpPr>
-          <p:cNvPr id="21" name="Text 19"/>
-          <p:cNvSpPr/>
-          <p:nvPr/>
-        </p:nvSpPr>
-        <p:spPr>
-          <a:xfrm>
-            <a:off x="6217920" y="2331720"/>
-            <a:ext cx="2331720" cy="2194560"/>
-          </a:xfrm>
-          <a:prstGeom prst="rect">
-            <a:avLst/>
-          </a:prstGeom>
-          <a:noFill/>
-          <a:ln/>
-        </p:spPr>
-        <p:txBody>
-          <a:bodyPr wrap="square" lIns="0" tIns="0" rIns="0" bIns="0" rtlCol="0" anchor="t"/>
-          <a:lstStyle/>
-          <a:p>
-            <a:pPr marL="342900" indent="-342900">
-              <a:spcAft>
-                <a:spcPts val="800"/>
-              </a:spcAft>
-              <a:buSzPct val="100000"/>
-              <a:buChar char="•"/>
-            </a:pPr>
-            <a:r>
-              <a:rPr lang="en-US" sz="1100" dirty="0">
-                <a:solidFill>
-                  <a:srgbClr val="D0E8FF"/>
-                </a:solidFill>
-              </a:rPr>
-              <a:t>Kendi kendini onaran testler</a:t>
-            </a:r>
-            <a:endParaRPr lang="en-US" sz="1100" dirty="0"/>
-          </a:p>
-          <a:p>
-            <a:pPr marL="342900" indent="-342900">
-              <a:spcAft>
-                <a:spcPts val="800"/>
-              </a:spcAft>
-              <a:buSzPct val="100000"/>
-              <a:buChar char="•"/>
-            </a:pPr>
-            <a:r>
-              <a:rPr lang="en-US" sz="1100" dirty="0">
-                <a:solidFill>
-                  <a:srgbClr val="D0E8FF"/>
-                </a:solidFill>
-              </a:rPr>
-              <a:t>UI değişimlerinde test kodunun çökmesini engeller</a:t>
-            </a:r>
-            <a:endParaRPr lang="en-US" sz="1100" dirty="0"/>
-          </a:p>
-          <a:p>
-            <a:pPr marL="342900" indent="-342900">
-              <a:spcAft>
-                <a:spcPts val="800"/>
-              </a:spcAft>
-              <a:buSzPct val="100000"/>
-              <a:buChar char="•"/>
-            </a:pPr>
-            <a:r>
-              <a:rPr lang="en-US" sz="1100" dirty="0">
-                <a:solidFill>
-                  <a:srgbClr val="D0E8FF"/>
-                </a:solidFill>
-              </a:rPr>
-              <a:t>Dinamik olarak yeni elementi bulan AI algoritmalarıdır</a:t>
-            </a:r>
-            <a:endParaRPr lang="en-US" sz="1100" dirty="0"/>
-          </a:p>
-        </p:txBody>
-      </p:sp>
-    </p:spTree>
-  </p:cSld>
-  <p:clrMapOvr>
-    <a:masterClrMapping/>
-  </p:clrMapOvr>
-</p:sld>
-</file>
-
-<file path=ppt/slides/slide9.xml><?xml version="1.0" encoding="utf-8"?>
-<p:sld xmlns:a="http://schemas.openxmlformats.org/drawingml/2006/main" xmlns:r="http://schemas.openxmlformats.org/officeDocument/2006/relationships" xmlns:p="http://schemas.openxmlformats.org/presentationml/2006/main">
-  <p:cSld name="Slide 9">
-    <p:bg>
-      <p:bgPr>
-        <a:solidFill>
-          <a:srgbClr val="0D1B2A"/>
-        </a:solidFill>
-        <a:effectLst/>
-      </p:bgPr>
-    </p:bg>
-    <p:spTree>
-      <p:nvGrpSpPr>
-        <p:cNvPr id="1" name=""/>
-        <p:cNvGrpSpPr/>
-        <p:nvPr/>
-      </p:nvGrpSpPr>
-      <p:grpSpPr>
-        <a:xfrm>
-          <a:off x="0" y="0"/>
-          <a:ext cx="0" cy="0"/>
-          <a:chOff x="0" y="0"/>
-          <a:chExt cx="0" cy="0"/>
-        </a:xfrm>
-      </p:grpSpPr>
-      <p:sp>
-        <p:nvSpPr>
-          <p:cNvPr id="2" name="Text 0"/>
-          <p:cNvSpPr/>
-          <p:nvPr/>
-        </p:nvSpPr>
-        <p:spPr>
-          <a:xfrm>
-            <a:off x="8503920" y="137160"/>
-            <a:ext cx="548640" cy="320040"/>
-          </a:xfrm>
-          <a:prstGeom prst="rect">
-            <a:avLst/>
-          </a:prstGeom>
-          <a:noFill/>
-          <a:ln/>
-        </p:spPr>
-        <p:txBody>
-          <a:bodyPr wrap="square" lIns="0" tIns="0" rIns="0" bIns="0" rtlCol="0" anchor="ctr"/>
-          <a:lstStyle/>
-          <a:p>
-            <a:pPr marL="0" indent="0">
-              <a:buNone/>
-            </a:pPr>
-            <a:r>
-              <a:rPr lang="en-US" sz="1000" b="1" dirty="0">
-                <a:solidFill>
-                  <a:srgbClr val="00C2FF">
-                    <a:alpha val="60000"/>
-                  </a:srgbClr>
-                </a:solidFill>
-              </a:rPr>
-              <a:t>09</a:t>
-            </a:r>
-            <a:endParaRPr lang="en-US" sz="1000" dirty="0"/>
-          </a:p>
-        </p:txBody>
-      </p:sp>
-      <p:sp>
-        <p:nvSpPr>
-          <p:cNvPr id="3" name="Text 1"/>
-          <p:cNvSpPr/>
-          <p:nvPr/>
-        </p:nvSpPr>
-        <p:spPr>
-          <a:xfrm>
-            <a:off x="420624" y="553212"/>
-            <a:ext cx="8229600" cy="594360"/>
-          </a:xfrm>
-          <a:prstGeom prst="rect">
-            <a:avLst/>
-          </a:prstGeom>
-          <a:noFill/>
-          <a:ln/>
-        </p:spPr>
-        <p:txBody>
-          <a:bodyPr wrap="square" lIns="0" tIns="0" rIns="0" bIns="0" rtlCol="0" anchor="ctr"/>
-          <a:lstStyle/>
-          <a:p>
-            <a:pPr marL="0" indent="0">
-              <a:buNone/>
-            </a:pPr>
-            <a:r>
-              <a:rPr lang="en-US" sz="2800" b="1" dirty="0">
-                <a:solidFill>
-                  <a:srgbClr val="FFFFFF"/>
-                </a:solidFill>
-                <a:latin typeface="Calibri" pitchFamily="34" charset="0"/>
-                <a:ea typeface="Calibri" pitchFamily="34" charset="-122"/>
-                <a:cs typeface="Calibri" pitchFamily="34" charset="-120"/>
-              </a:rPr>
-              <a:t>Test Mühendisinin </a:t>
-            </a:r>
-            <a:r>
-              <a:rPr lang="en-US" sz="2800" b="1" dirty="0">
-                <a:solidFill>
-                  <a:srgbClr val="7B61FF"/>
-                </a:solidFill>
-                <a:latin typeface="Calibri" pitchFamily="34" charset="0"/>
-                <a:ea typeface="Calibri" pitchFamily="34" charset="-122"/>
-                <a:cs typeface="Calibri" pitchFamily="34" charset="-120"/>
-              </a:rPr>
-              <a:t>Gelecekteki Rolü</a:t>
-            </a:r>
-            <a:endParaRPr lang="en-US" sz="2800" dirty="0"/>
-          </a:p>
-        </p:txBody>
-      </p:sp>
-      <p:sp>
-        <p:nvSpPr>
-          <p:cNvPr id="4" name="Shape 2"/>
-          <p:cNvSpPr/>
-          <p:nvPr/>
-        </p:nvSpPr>
-        <p:spPr>
-          <a:xfrm>
-            <a:off x="365760" y="1005840"/>
-            <a:ext cx="8412480" cy="504613"/>
-          </a:xfrm>
-          <a:prstGeom prst="rect">
-            <a:avLst/>
-          </a:prstGeom>
-          <a:solidFill>
-            <a:srgbClr val="7B61FF">
-              <a:alpha val="12000"/>
-            </a:srgbClr>
-          </a:solidFill>
-          <a:ln w="12700">
-            <a:solidFill>
-              <a:srgbClr val="7B61FF">
-                <a:alpha val="40000"/>
-              </a:srgbClr>
-            </a:solidFill>
-            <a:prstDash val="solid"/>
-          </a:ln>
-        </p:spPr>
-      </p:sp>
-      <p:sp>
-        <p:nvSpPr>
-          <p:cNvPr id="5" name="Shape 3"/>
-          <p:cNvSpPr/>
-          <p:nvPr/>
-        </p:nvSpPr>
-        <p:spPr>
-          <a:xfrm>
-            <a:off x="365760" y="1005840"/>
-            <a:ext cx="54864" cy="822960"/>
-          </a:xfrm>
-          <a:prstGeom prst="rect">
-            <a:avLst/>
-          </a:prstGeom>
-          <a:solidFill>
-            <a:srgbClr val="7B61FF"/>
-          </a:solidFill>
-          <a:ln w="12700">
-            <a:solidFill>
-              <a:srgbClr val="7B61FF"/>
-            </a:solidFill>
-            <a:prstDash val="solid"/>
-          </a:ln>
-        </p:spPr>
-      </p:sp>
-      <p:sp>
-        <p:nvSpPr>
-          <p:cNvPr id="7" name="Shape 5"/>
-          <p:cNvSpPr/>
-          <p:nvPr/>
-        </p:nvSpPr>
-        <p:spPr>
-          <a:xfrm>
-            <a:off x="393192" y="1742948"/>
-            <a:ext cx="4069080" cy="1325880"/>
-          </a:xfrm>
-          <a:prstGeom prst="rect">
-            <a:avLst/>
-          </a:prstGeom>
-          <a:solidFill>
-            <a:srgbClr val="162840"/>
-          </a:solidFill>
-          <a:ln w="12700">
-            <a:solidFill>
-              <a:srgbClr val="00C2FF">
-                <a:alpha val="35000"/>
-              </a:srgbClr>
-            </a:solidFill>
-            <a:prstDash val="solid"/>
-          </a:ln>
-          <a:effectLst>
-            <a:outerShdw blurRad="127000" dist="38100" dir="8100000" algn="bl" rotWithShape="0">
-              <a:srgbClr val="000000">
-                <a:alpha val="25000"/>
-              </a:srgbClr>
-            </a:outerShdw>
-          </a:effectLst>
-        </p:spPr>
-      </p:sp>
-      <p:sp>
-        <p:nvSpPr>
-          <p:cNvPr id="8" name="Text 6"/>
-          <p:cNvSpPr/>
-          <p:nvPr/>
-        </p:nvSpPr>
-        <p:spPr>
-          <a:xfrm>
-            <a:off x="457200" y="2011680"/>
-            <a:ext cx="640080" cy="1325880"/>
-          </a:xfrm>
-          <a:prstGeom prst="rect">
-            <a:avLst/>
-          </a:prstGeom>
-          <a:noFill/>
-          <a:ln/>
-        </p:spPr>
-        <p:txBody>
-          <a:bodyPr wrap="square" lIns="0" tIns="0" rIns="0" bIns="0" rtlCol="0" anchor="ctr"/>
-          <a:lstStyle/>
-          <a:p>
-            <a:pPr marL="0" indent="0" algn="ctr">
-              <a:buNone/>
-            </a:pPr>
-            <a:r>
-              <a:rPr lang="en-US" sz="2200" dirty="0">
-                <a:solidFill>
-                  <a:srgbClr val="000000"/>
-                </a:solidFill>
-              </a:rPr>
-              <a:t>🏗️</a:t>
-            </a:r>
-            <a:endParaRPr lang="en-US" sz="2200" dirty="0"/>
-          </a:p>
-        </p:txBody>
-      </p:sp>
-      <p:sp>
-        <p:nvSpPr>
-          <p:cNvPr id="9" name="Text 7"/>
-          <p:cNvSpPr/>
-          <p:nvPr/>
-        </p:nvSpPr>
-        <p:spPr>
-          <a:xfrm>
-            <a:off x="1051560" y="2121408"/>
-            <a:ext cx="3246120" cy="365760"/>
-          </a:xfrm>
-          <a:prstGeom prst="rect">
-            <a:avLst/>
-          </a:prstGeom>
-          <a:noFill/>
-          <a:ln/>
-        </p:spPr>
-        <p:txBody>
-          <a:bodyPr wrap="square" lIns="0" tIns="0" rIns="0" bIns="0" rtlCol="0" anchor="ctr"/>
-          <a:lstStyle/>
-          <a:p>
-            <a:pPr marL="0" indent="0">
-              <a:buNone/>
-            </a:pPr>
-            <a:r>
-              <a:rPr lang="en-US" sz="1200" b="1" dirty="0">
-                <a:solidFill>
-                  <a:srgbClr val="00C2FF"/>
-                </a:solidFill>
-              </a:rPr>
-              <a:t>Test Mimarisini Kuran Tasarımcı</a:t>
+              <a:rPr lang="en-US" sz="1200" dirty="0">
+                <a:solidFill>
+                  <a:srgbClr val="8BA8C8"/>
+                </a:solidFill>
+              </a:rPr>
+              <a:t>Kenan Yılmaz  ·  Yazılım Test Mühendisliği Sunumu</a:t>
             </a:r>
             <a:endParaRPr lang="en-US" sz="1200" dirty="0"/>
-          </a:p>
-        </p:txBody>
-      </p:sp>
-      <p:sp>
-        <p:nvSpPr>
-          <p:cNvPr id="10" name="Text 8"/>
-          <p:cNvSpPr/>
-          <p:nvPr/>
-        </p:nvSpPr>
-        <p:spPr>
-          <a:xfrm>
-            <a:off x="1051560" y="2514600"/>
-            <a:ext cx="3246120" cy="731520"/>
-          </a:xfrm>
-          <a:prstGeom prst="rect">
-            <a:avLst/>
-          </a:prstGeom>
-          <a:noFill/>
-          <a:ln/>
-        </p:spPr>
-        <p:txBody>
-          <a:bodyPr wrap="square" lIns="0" tIns="0" rIns="0" bIns="0" rtlCol="0" anchor="t"/>
-          <a:lstStyle/>
-          <a:p>
-            <a:pPr marL="0" indent="0">
-              <a:buNone/>
-            </a:pPr>
-            <a:r>
-              <a:rPr lang="en-US" sz="1050" dirty="0">
-                <a:solidFill>
-                  <a:srgbClr val="8BA8C8"/>
-                </a:solidFill>
-              </a:rPr>
-              <a:t>Manuel tıklamalardan ziyade, test mimarisini kuran tasarımcı mühendislere dönüşüm yaşanıyor.</a:t>
-            </a:r>
-            <a:endParaRPr lang="en-US" sz="1050" dirty="0"/>
-          </a:p>
-        </p:txBody>
-      </p:sp>
-      <p:sp>
-        <p:nvSpPr>
-          <p:cNvPr id="11" name="Shape 9"/>
-          <p:cNvSpPr/>
-          <p:nvPr/>
-        </p:nvSpPr>
-        <p:spPr>
-          <a:xfrm>
-            <a:off x="4681728" y="1742948"/>
-            <a:ext cx="4069080" cy="1325880"/>
-          </a:xfrm>
-          <a:prstGeom prst="rect">
-            <a:avLst/>
-          </a:prstGeom>
-          <a:solidFill>
-            <a:srgbClr val="162840"/>
-          </a:solidFill>
-          <a:ln w="12700">
-            <a:solidFill>
-              <a:srgbClr val="00E5A0">
-                <a:alpha val="35000"/>
-              </a:srgbClr>
-            </a:solidFill>
-            <a:prstDash val="solid"/>
-          </a:ln>
-          <a:effectLst>
-            <a:outerShdw blurRad="127000" dist="38100" dir="8100000" algn="bl" rotWithShape="0">
-              <a:srgbClr val="000000">
-                <a:alpha val="25000"/>
-              </a:srgbClr>
-            </a:outerShdw>
-          </a:effectLst>
-        </p:spPr>
-      </p:sp>
-      <p:sp>
-        <p:nvSpPr>
-          <p:cNvPr id="12" name="Text 10"/>
-          <p:cNvSpPr/>
-          <p:nvPr/>
-        </p:nvSpPr>
-        <p:spPr>
-          <a:xfrm>
-            <a:off x="4800600" y="2011680"/>
-            <a:ext cx="640080" cy="1325880"/>
-          </a:xfrm>
-          <a:prstGeom prst="rect">
-            <a:avLst/>
-          </a:prstGeom>
-          <a:noFill/>
-          <a:ln/>
-        </p:spPr>
-        <p:txBody>
-          <a:bodyPr wrap="square" lIns="0" tIns="0" rIns="0" bIns="0" rtlCol="0" anchor="ctr"/>
-          <a:lstStyle/>
-          <a:p>
-            <a:pPr marL="0" indent="0" algn="ctr">
-              <a:buNone/>
-            </a:pPr>
-            <a:r>
-              <a:rPr lang="en-US" sz="2200" dirty="0">
-                <a:solidFill>
-                  <a:srgbClr val="000000"/>
-                </a:solidFill>
-              </a:rPr>
-              <a:t>🎯</a:t>
-            </a:r>
-            <a:endParaRPr lang="en-US" sz="2200" dirty="0"/>
-          </a:p>
-        </p:txBody>
-      </p:sp>
-      <p:sp>
-        <p:nvSpPr>
-          <p:cNvPr id="13" name="Text 11"/>
-          <p:cNvSpPr/>
-          <p:nvPr/>
-        </p:nvSpPr>
-        <p:spPr>
-          <a:xfrm>
-            <a:off x="5394960" y="2121408"/>
-            <a:ext cx="3246120" cy="365760"/>
-          </a:xfrm>
-          <a:prstGeom prst="rect">
-            <a:avLst/>
-          </a:prstGeom>
-          <a:noFill/>
-          <a:ln/>
-        </p:spPr>
-        <p:txBody>
-          <a:bodyPr wrap="square" lIns="0" tIns="0" rIns="0" bIns="0" rtlCol="0" anchor="ctr"/>
-          <a:lstStyle/>
-          <a:p>
-            <a:pPr marL="0" indent="0">
-              <a:buNone/>
-            </a:pPr>
-            <a:r>
-              <a:rPr lang="en-US" sz="1200" b="1" dirty="0">
-                <a:solidFill>
-                  <a:srgbClr val="00E5A0"/>
-                </a:solidFill>
-              </a:rPr>
-              <a:t>AI Araçlarını Eğitmek</a:t>
-            </a:r>
-            <a:endParaRPr lang="en-US" sz="1200" dirty="0"/>
-          </a:p>
-        </p:txBody>
-      </p:sp>
-      <p:sp>
-        <p:nvSpPr>
-          <p:cNvPr id="14" name="Text 12"/>
-          <p:cNvSpPr/>
-          <p:nvPr/>
-        </p:nvSpPr>
-        <p:spPr>
-          <a:xfrm>
-            <a:off x="5394960" y="2514600"/>
-            <a:ext cx="3246120" cy="731520"/>
-          </a:xfrm>
-          <a:prstGeom prst="rect">
-            <a:avLst/>
-          </a:prstGeom>
-          <a:noFill/>
-          <a:ln/>
-        </p:spPr>
-        <p:txBody>
-          <a:bodyPr wrap="square" lIns="0" tIns="0" rIns="0" bIns="0" rtlCol="0" anchor="t"/>
-          <a:lstStyle/>
-          <a:p>
-            <a:pPr marL="0" indent="0">
-              <a:buNone/>
-            </a:pPr>
-            <a:r>
-              <a:rPr lang="en-US" sz="1050" dirty="0">
-                <a:solidFill>
-                  <a:srgbClr val="8BA8C8"/>
-                </a:solidFill>
-              </a:rPr>
-              <a:t>Yapay zeka araçlarını doğru verilerle eğitmek ve karmaşık çıktılarını analiz etmek.</a:t>
-            </a:r>
-            <a:endParaRPr lang="en-US" sz="1050" dirty="0"/>
-          </a:p>
-        </p:txBody>
-      </p:sp>
-      <p:sp>
-        <p:nvSpPr>
-          <p:cNvPr id="15" name="Shape 13"/>
-          <p:cNvSpPr/>
-          <p:nvPr/>
-        </p:nvSpPr>
-        <p:spPr>
-          <a:xfrm>
-            <a:off x="393192" y="3246120"/>
-            <a:ext cx="4069080" cy="1325880"/>
-          </a:xfrm>
-          <a:prstGeom prst="rect">
-            <a:avLst/>
-          </a:prstGeom>
-          <a:solidFill>
-            <a:srgbClr val="162840"/>
-          </a:solidFill>
-          <a:ln w="12700">
-            <a:solidFill>
-              <a:srgbClr val="7B61FF">
-                <a:alpha val="35000"/>
-              </a:srgbClr>
-            </a:solidFill>
-            <a:prstDash val="solid"/>
-          </a:ln>
-          <a:effectLst>
-            <a:outerShdw blurRad="127000" dist="38100" dir="8100000" algn="bl" rotWithShape="0">
-              <a:srgbClr val="000000">
-                <a:alpha val="25000"/>
-              </a:srgbClr>
-            </a:outerShdw>
-          </a:effectLst>
-        </p:spPr>
-      </p:sp>
-      <p:sp>
-        <p:nvSpPr>
-          <p:cNvPr id="16" name="Text 14"/>
-          <p:cNvSpPr/>
-          <p:nvPr/>
-        </p:nvSpPr>
-        <p:spPr>
-          <a:xfrm>
-            <a:off x="457200" y="3520440"/>
-            <a:ext cx="640080" cy="1325880"/>
-          </a:xfrm>
-          <a:prstGeom prst="rect">
-            <a:avLst/>
-          </a:prstGeom>
-          <a:noFill/>
-          <a:ln/>
-        </p:spPr>
-        <p:txBody>
-          <a:bodyPr wrap="square" lIns="0" tIns="0" rIns="0" bIns="0" rtlCol="0" anchor="ctr"/>
-          <a:lstStyle/>
-          <a:p>
-            <a:pPr marL="0" indent="0" algn="ctr">
-              <a:buNone/>
-            </a:pPr>
-            <a:r>
-              <a:rPr lang="en-US" sz="2200" dirty="0">
-                <a:solidFill>
-                  <a:srgbClr val="000000"/>
-                </a:solidFill>
-              </a:rPr>
-              <a:t>🔬</a:t>
-            </a:r>
-            <a:endParaRPr lang="en-US" sz="2200" dirty="0"/>
-          </a:p>
-        </p:txBody>
-      </p:sp>
-      <p:sp>
-        <p:nvSpPr>
-          <p:cNvPr id="17" name="Text 15"/>
-          <p:cNvSpPr/>
-          <p:nvPr/>
-        </p:nvSpPr>
-        <p:spPr>
-          <a:xfrm>
-            <a:off x="1051560" y="3630168"/>
-            <a:ext cx="3246120" cy="365760"/>
-          </a:xfrm>
-          <a:prstGeom prst="rect">
-            <a:avLst/>
-          </a:prstGeom>
-          <a:noFill/>
-          <a:ln/>
-        </p:spPr>
-        <p:txBody>
-          <a:bodyPr wrap="square" lIns="0" tIns="0" rIns="0" bIns="0" rtlCol="0" anchor="ctr"/>
-          <a:lstStyle/>
-          <a:p>
-            <a:pPr marL="0" indent="0">
-              <a:buNone/>
-            </a:pPr>
-            <a:r>
-              <a:rPr lang="en-US" sz="1200" b="1" dirty="0">
-                <a:solidFill>
-                  <a:srgbClr val="7B61FF"/>
-                </a:solidFill>
-              </a:rPr>
-              <a:t>AI Kodunu Test Etmek</a:t>
-            </a:r>
-            <a:endParaRPr lang="en-US" sz="1200" dirty="0"/>
-          </a:p>
-        </p:txBody>
-      </p:sp>
-      <p:sp>
-        <p:nvSpPr>
-          <p:cNvPr id="18" name="Text 16"/>
-          <p:cNvSpPr/>
-          <p:nvPr/>
-        </p:nvSpPr>
-        <p:spPr>
-          <a:xfrm>
-            <a:off x="1051560" y="4023360"/>
-            <a:ext cx="3246120" cy="731520"/>
-          </a:xfrm>
-          <a:prstGeom prst="rect">
-            <a:avLst/>
-          </a:prstGeom>
-          <a:noFill/>
-          <a:ln/>
-        </p:spPr>
-        <p:txBody>
-          <a:bodyPr wrap="square" lIns="0" tIns="0" rIns="0" bIns="0" rtlCol="0" anchor="t"/>
-          <a:lstStyle/>
-          <a:p>
-            <a:pPr marL="0" indent="0">
-              <a:buNone/>
-            </a:pPr>
-            <a:r>
-              <a:rPr lang="en-US" sz="1050" dirty="0">
-                <a:solidFill>
-                  <a:srgbClr val="8BA8C8"/>
-                </a:solidFill>
-              </a:rPr>
-              <a:t>AI'ın ürettiği kodları test etmek: Prompt doğrulaması ve yapay zeka halüsinasyon testleri.</a:t>
-            </a:r>
-            <a:endParaRPr lang="en-US" sz="1050" dirty="0"/>
-          </a:p>
-        </p:txBody>
-      </p:sp>
-      <p:sp>
-        <p:nvSpPr>
-          <p:cNvPr id="19" name="Shape 17"/>
-          <p:cNvSpPr/>
-          <p:nvPr/>
-        </p:nvSpPr>
-        <p:spPr>
-          <a:xfrm>
-            <a:off x="4681728" y="3246120"/>
-            <a:ext cx="4069080" cy="1325880"/>
-          </a:xfrm>
-          <a:prstGeom prst="rect">
-            <a:avLst/>
-          </a:prstGeom>
-          <a:solidFill>
-            <a:srgbClr val="162840"/>
-          </a:solidFill>
-          <a:ln w="12700">
-            <a:solidFill>
-              <a:srgbClr val="FF7B54">
-                <a:alpha val="35000"/>
-              </a:srgbClr>
-            </a:solidFill>
-            <a:prstDash val="solid"/>
-          </a:ln>
-          <a:effectLst>
-            <a:outerShdw blurRad="127000" dist="38100" dir="8100000" algn="bl" rotWithShape="0">
-              <a:srgbClr val="000000">
-                <a:alpha val="25000"/>
-              </a:srgbClr>
-            </a:outerShdw>
-          </a:effectLst>
-        </p:spPr>
-      </p:sp>
-      <p:sp>
-        <p:nvSpPr>
-          <p:cNvPr id="20" name="Text 18"/>
-          <p:cNvSpPr/>
-          <p:nvPr/>
-        </p:nvSpPr>
-        <p:spPr>
-          <a:xfrm>
-            <a:off x="4800600" y="3520440"/>
-            <a:ext cx="640080" cy="1325880"/>
-          </a:xfrm>
-          <a:prstGeom prst="rect">
-            <a:avLst/>
-          </a:prstGeom>
-          <a:noFill/>
-          <a:ln/>
-        </p:spPr>
-        <p:txBody>
-          <a:bodyPr wrap="square" lIns="0" tIns="0" rIns="0" bIns="0" rtlCol="0" anchor="ctr"/>
-          <a:lstStyle/>
-          <a:p>
-            <a:pPr marL="0" indent="0" algn="ctr">
-              <a:buNone/>
-            </a:pPr>
-            <a:r>
-              <a:rPr lang="en-US" sz="2200" dirty="0">
-                <a:solidFill>
-                  <a:srgbClr val="000000"/>
-                </a:solidFill>
-              </a:rPr>
-              <a:t>🛡️</a:t>
-            </a:r>
-            <a:endParaRPr lang="en-US" sz="2200" dirty="0"/>
-          </a:p>
-        </p:txBody>
-      </p:sp>
-      <p:sp>
-        <p:nvSpPr>
-          <p:cNvPr id="21" name="Text 19"/>
-          <p:cNvSpPr/>
-          <p:nvPr/>
-        </p:nvSpPr>
-        <p:spPr>
-          <a:xfrm>
-            <a:off x="5394960" y="3630168"/>
-            <a:ext cx="3246120" cy="365760"/>
-          </a:xfrm>
-          <a:prstGeom prst="rect">
-            <a:avLst/>
-          </a:prstGeom>
-          <a:noFill/>
-          <a:ln/>
-        </p:spPr>
-        <p:txBody>
-          <a:bodyPr wrap="square" lIns="0" tIns="0" rIns="0" bIns="0" rtlCol="0" anchor="ctr"/>
-          <a:lstStyle/>
-          <a:p>
-            <a:pPr marL="0" indent="0">
-              <a:buNone/>
-            </a:pPr>
-            <a:r>
-              <a:rPr lang="en-US" sz="1200" b="1" dirty="0">
-                <a:solidFill>
-                  <a:srgbClr val="FF7B54"/>
-                </a:solidFill>
-              </a:rPr>
-              <a:t>ML Destekli Güvenlik</a:t>
-            </a:r>
-            <a:endParaRPr lang="en-US" sz="1200" dirty="0"/>
-          </a:p>
-        </p:txBody>
-      </p:sp>
-      <p:sp>
-        <p:nvSpPr>
-          <p:cNvPr id="22" name="Text 20"/>
-          <p:cNvSpPr/>
-          <p:nvPr/>
-        </p:nvSpPr>
-        <p:spPr>
-          <a:xfrm>
-            <a:off x="5394960" y="4023360"/>
-            <a:ext cx="3246120" cy="731520"/>
-          </a:xfrm>
-          <a:prstGeom prst="rect">
-            <a:avLst/>
-          </a:prstGeom>
-          <a:noFill/>
-          <a:ln/>
-        </p:spPr>
-        <p:txBody>
-          <a:bodyPr wrap="square" lIns="0" tIns="0" rIns="0" bIns="0" rtlCol="0" anchor="t"/>
-          <a:lstStyle/>
-          <a:p>
-            <a:pPr marL="0" indent="0">
-              <a:buNone/>
-            </a:pPr>
-            <a:r>
-              <a:rPr lang="en-US" sz="1050" dirty="0">
-                <a:solidFill>
-                  <a:srgbClr val="8BA8C8"/>
-                </a:solidFill>
-              </a:rPr>
-              <a:t>Siber güvenlik ve performans test süreçlerinin makine öğrenmesi algoritmalarıyla desteklenmesi.</a:t>
-            </a:r>
-            <a:endParaRPr lang="en-US" sz="1050" dirty="0"/>
           </a:p>
         </p:txBody>
       </p:sp>
